--- a/media/exports/reports/2026-05/growth-trades.pptx
+++ b/media/exports/reports/2026-05/growth-trades.pptx
@@ -234,64 +234,64 @@
                 <c:formatCode>$#,##0;[Red]($#,##0);"-"</c:formatCode>
                 <c:ptCount val="20"/>
                 <c:pt idx="0">
-                  <c:v>171009</c:v>
+                  <c:v>191014</c:v>
                 </c:pt>
                 <c:pt idx="1">
-                  <c:v>179474</c:v>
+                  <c:v>200124</c:v>
                 </c:pt>
                 <c:pt idx="2">
-                  <c:v>143156</c:v>
+                  <c:v>159406</c:v>
                 </c:pt>
                 <c:pt idx="3">
-                  <c:v>140909</c:v>
+                  <c:v>156794</c:v>
                 </c:pt>
                 <c:pt idx="4">
-                  <c:v>160943</c:v>
+                  <c:v>179190</c:v>
                 </c:pt>
                 <c:pt idx="5">
-                  <c:v>135082</c:v>
+                  <c:v>150465</c:v>
                 </c:pt>
                 <c:pt idx="6">
-                  <c:v>124705</c:v>
+                  <c:v>138865</c:v>
                 </c:pt>
                 <c:pt idx="7">
-                  <c:v>129816</c:v>
+                  <c:v>144649</c:v>
                 </c:pt>
                 <c:pt idx="8">
-                  <c:v>164113</c:v>
+                  <c:v>183265</c:v>
                 </c:pt>
                 <c:pt idx="9">
-                  <c:v>186760</c:v>
+                  <c:v>208588</c:v>
                 </c:pt>
                 <c:pt idx="10">
-                  <c:v>139164</c:v>
+                  <c:v>155118</c:v>
                 </c:pt>
                 <c:pt idx="11">
-                  <c:v>128255</c:v>
+                  <c:v>143077</c:v>
                 </c:pt>
                 <c:pt idx="12">
-                  <c:v>128898</c:v>
+                  <c:v>143566</c:v>
                 </c:pt>
                 <c:pt idx="13">
-                  <c:v>174786</c:v>
+                  <c:v>194966</c:v>
                 </c:pt>
                 <c:pt idx="14">
-                  <c:v>135079</c:v>
+                  <c:v>150283</c:v>
                 </c:pt>
                 <c:pt idx="15">
-                  <c:v>164780</c:v>
+                  <c:v>183306</c:v>
                 </c:pt>
                 <c:pt idx="16">
-                  <c:v>196372</c:v>
+                  <c:v>218908</c:v>
                 </c:pt>
                 <c:pt idx="17">
-                  <c:v>191500</c:v>
+                  <c:v>213578</c:v>
                 </c:pt>
                 <c:pt idx="18">
-                  <c:v>164987</c:v>
+                  <c:v>183967</c:v>
                 </c:pt>
                 <c:pt idx="19">
-                  <c:v>161963</c:v>
+                  <c:v>180342</c:v>
                 </c:pt>
               </c:numCache>
             </c:numRef>
@@ -522,64 +522,64 @@
                 <c:formatCode>$#,##0;[Red]($#,##0);"-"</c:formatCode>
                 <c:ptCount val="20"/>
                 <c:pt idx="0">
-                  <c:v>24670</c:v>
+                  <c:v>27650</c:v>
                 </c:pt>
                 <c:pt idx="1">
-                  <c:v>24670</c:v>
+                  <c:v>27650</c:v>
                 </c:pt>
                 <c:pt idx="2">
-                  <c:v>24670</c:v>
+                  <c:v>27650</c:v>
                 </c:pt>
                 <c:pt idx="3">
-                  <c:v>24670</c:v>
+                  <c:v>27650</c:v>
                 </c:pt>
                 <c:pt idx="4">
-                  <c:v>27930</c:v>
+                  <c:v>31300</c:v>
                 </c:pt>
                 <c:pt idx="5">
-                  <c:v>27930</c:v>
+                  <c:v>31300</c:v>
                 </c:pt>
                 <c:pt idx="6">
-                  <c:v>27930</c:v>
+                  <c:v>31300</c:v>
                 </c:pt>
                 <c:pt idx="7">
-                  <c:v>27930</c:v>
+                  <c:v>31300</c:v>
                 </c:pt>
                 <c:pt idx="8">
-                  <c:v>31870</c:v>
+                  <c:v>35720</c:v>
                 </c:pt>
                 <c:pt idx="9">
-                  <c:v>33200</c:v>
+                  <c:v>37200</c:v>
                 </c:pt>
                 <c:pt idx="10">
-                  <c:v>33200</c:v>
+                  <c:v>37200</c:v>
                 </c:pt>
                 <c:pt idx="11">
-                  <c:v>33200</c:v>
+                  <c:v>37200</c:v>
                 </c:pt>
                 <c:pt idx="12">
-                  <c:v>35800</c:v>
+                  <c:v>40100</c:v>
                 </c:pt>
                 <c:pt idx="13">
-                  <c:v>35800</c:v>
+                  <c:v>40100</c:v>
                 </c:pt>
                 <c:pt idx="14">
-                  <c:v>35800</c:v>
+                  <c:v>40100</c:v>
                 </c:pt>
                 <c:pt idx="15">
-                  <c:v>35800</c:v>
+                  <c:v>40100</c:v>
                 </c:pt>
                 <c:pt idx="16">
-                  <c:v>37500</c:v>
+                  <c:v>42000</c:v>
                 </c:pt>
                 <c:pt idx="17">
-                  <c:v>37500</c:v>
+                  <c:v>42000</c:v>
                 </c:pt>
                 <c:pt idx="18">
-                  <c:v>37500</c:v>
+                  <c:v>42000</c:v>
                 </c:pt>
                 <c:pt idx="19">
-                  <c:v>40500</c:v>
+                  <c:v>45350</c:v>
                 </c:pt>
               </c:numCache>
             </c:numRef>
@@ -810,64 +810,64 @@
                 <c:formatCode>$#,##0;[Red]($#,##0);"-"</c:formatCode>
                 <c:ptCount val="20"/>
                 <c:pt idx="0">
+                  <c:v>141600</c:v>
+                </c:pt>
+                <c:pt idx="1">
+                  <c:v>147100</c:v>
+                </c:pt>
+                <c:pt idx="2">
+                  <c:v>103700</c:v>
+                </c:pt>
+                <c:pt idx="3">
+                  <c:v>100100</c:v>
+                </c:pt>
+                <c:pt idx="4">
+                  <c:v>118600</c:v>
+                </c:pt>
+                <c:pt idx="5">
+                  <c:v>96400</c:v>
+                </c:pt>
+                <c:pt idx="6">
+                  <c:v>83900</c:v>
+                </c:pt>
+                <c:pt idx="7">
+                  <c:v>89900</c:v>
+                </c:pt>
+                <c:pt idx="8">
                   <c:v>126300</c:v>
                 </c:pt>
-                <c:pt idx="1">
-                  <c:v>131400</c:v>
-                </c:pt>
-                <c:pt idx="2">
-                  <c:v>92600</c:v>
-                </c:pt>
-                <c:pt idx="3">
-                  <c:v>89400</c:v>
-                </c:pt>
-                <c:pt idx="4">
-                  <c:v>106000</c:v>
-                </c:pt>
-                <c:pt idx="5">
-                  <c:v>86100</c:v>
-                </c:pt>
-                <c:pt idx="6">
-                  <c:v>74900</c:v>
-                </c:pt>
-                <c:pt idx="7">
-                  <c:v>80300</c:v>
-                </c:pt>
-                <c:pt idx="8">
-                  <c:v>112700</c:v>
-                </c:pt>
                 <c:pt idx="9">
-                  <c:v>135800</c:v>
+                  <c:v>152100</c:v>
                 </c:pt>
                 <c:pt idx="10">
-                  <c:v>86200</c:v>
+                  <c:v>96500</c:v>
                 </c:pt>
                 <c:pt idx="11">
-                  <c:v>75100</c:v>
+                  <c:v>84200</c:v>
                 </c:pt>
                 <c:pt idx="12">
-                  <c:v>70800</c:v>
+                  <c:v>79300</c:v>
                 </c:pt>
                 <c:pt idx="13">
-                  <c:v>113300</c:v>
+                  <c:v>126900</c:v>
                 </c:pt>
                 <c:pt idx="14">
-                  <c:v>69700</c:v>
+                  <c:v>78100</c:v>
                 </c:pt>
                 <c:pt idx="15">
-                  <c:v>97500</c:v>
+                  <c:v>109100</c:v>
                 </c:pt>
                 <c:pt idx="16">
-                  <c:v>129300</c:v>
+                  <c:v>144800</c:v>
                 </c:pt>
                 <c:pt idx="17">
-                  <c:v>129400</c:v>
+                  <c:v>144900</c:v>
                 </c:pt>
                 <c:pt idx="18">
-                  <c:v>104400</c:v>
+                  <c:v>116900</c:v>
                 </c:pt>
                 <c:pt idx="19">
-                  <c:v>92400</c:v>
+                  <c:v>103400</c:v>
                 </c:pt>
               </c:numCache>
             </c:numRef>
@@ -916,7 +916,7 @@
         <c:axId val="-2100718248"/>
         <c:scaling>
           <c:orientation val="minMax"/>
-          <c:max val="150000.0"/>
+          <c:max val="200000.0"/>
           <c:min val="0.0"/>
         </c:scaling>
         <c:delete val="0"/>
@@ -1098,64 +1098,64 @@
                 <c:formatCode>$#,##0;[Red]($#,##0);"-"</c:formatCode>
                 <c:ptCount val="20"/>
                 <c:pt idx="0">
-                  <c:v>20039</c:v>
+                  <c:v>21764</c:v>
                 </c:pt>
                 <c:pt idx="1">
-                  <c:v>23404</c:v>
+                  <c:v>25374</c:v>
                 </c:pt>
                 <c:pt idx="2">
-                  <c:v>25886</c:v>
+                  <c:v>28056</c:v>
                 </c:pt>
                 <c:pt idx="3">
-                  <c:v>26839</c:v>
+                  <c:v>29044</c:v>
                 </c:pt>
                 <c:pt idx="4">
-                  <c:v>27013</c:v>
+                  <c:v>29290</c:v>
                 </c:pt>
                 <c:pt idx="5">
-                  <c:v>21052</c:v>
+                  <c:v>22765</c:v>
                 </c:pt>
                 <c:pt idx="6">
-                  <c:v>21875</c:v>
+                  <c:v>23665</c:v>
                 </c:pt>
                 <c:pt idx="7">
-                  <c:v>21586</c:v>
+                  <c:v>23449</c:v>
                 </c:pt>
                 <c:pt idx="8">
-                  <c:v>19543</c:v>
+                  <c:v>21245</c:v>
                 </c:pt>
                 <c:pt idx="9">
-                  <c:v>17760</c:v>
+                  <c:v>19288</c:v>
                 </c:pt>
                 <c:pt idx="10">
-                  <c:v>19764</c:v>
+                  <c:v>21418</c:v>
                 </c:pt>
                 <c:pt idx="11">
-                  <c:v>19955</c:v>
+                  <c:v>21677</c:v>
                 </c:pt>
                 <c:pt idx="12">
-                  <c:v>22298</c:v>
+                  <c:v>24166</c:v>
                 </c:pt>
                 <c:pt idx="13">
-                  <c:v>25686</c:v>
+                  <c:v>27966</c:v>
                 </c:pt>
                 <c:pt idx="14">
-                  <c:v>29579</c:v>
+                  <c:v>32083</c:v>
                 </c:pt>
                 <c:pt idx="15">
-                  <c:v>31480</c:v>
+                  <c:v>34106</c:v>
                 </c:pt>
                 <c:pt idx="16">
-                  <c:v>29572</c:v>
+                  <c:v>32108</c:v>
                 </c:pt>
                 <c:pt idx="17">
-                  <c:v>24600</c:v>
+                  <c:v>26678</c:v>
                 </c:pt>
                 <c:pt idx="18">
-                  <c:v>23087</c:v>
+                  <c:v>25067</c:v>
                 </c:pt>
                 <c:pt idx="19">
-                  <c:v>29063</c:v>
+                  <c:v>31592</c:v>
                 </c:pt>
               </c:numCache>
             </c:numRef>
@@ -1729,7 +1729,7 @@
           <a:lstStyle/>
           <a:p>
             <a:r>
-              <a:t>Trades · All. May against May last year: 24.8%; Year to date (Jul to May 2026): $1,772,544; Gross margin, year to date: 37.7%. Revenue is $1,772,544 this financial year to date (Jul to May 2026). Maintenance contracts make the highest gross margin (59.5%); Installations the lowest (28.4%). The business needs 39.9% gross margin just to cover overheads. Installations: 28.4% gross margin, 6.6 points under the 35.0% target: about $72,943 on $1,103,900 of revenue this financial year to date. It's below the 39.9% needed to cover overheads, too. Maintenance contracts: 59.5% gross margin, 24.5 points over the 35.0% target ($97,010 ahead on $395,800 this financial year to date).</a:t>
+              <a:t>Trades · All. May against May last year: 24.7%; Year to date (Jul to May 2026): $1,975,699; Gross margin, year to date: 44.1%. Revenue is $1,975,699 this financial year to date (Jul to May 2026). Maintenance contracts make the highest gross margin (63.9%); Installations the lowest (36.1%). The business needs 45.7% gross margin just to cover overheads. Installations: 36.1% gross margin, 1.1 points over the 35.0% target ($13,052 ahead on $1,236,200 this financial year to date). Maintenance contracts: 63.9% gross margin, 28.9 points over the 35.0% target ($127,918 ahead on $443,350 this financial year to date).</a:t>
             </a:r>
           </a:p>
         </p:txBody>
@@ -1799,7 +1799,7 @@
           <a:lstStyle/>
           <a:p>
             <a:r>
-              <a:t>Trades · Maintenance contracts. May against May last year: 45.0%; Year to date (Jul to May 2026): $395,800; Gross margin, year to date: 59.5%. Maintenance contracts brought in $395,800 this financial year to date, at a 59.5% gross margin (above the 37.7% overall). Maintenance contracts: 59.5% gross margin, 24.5 points over the 35.0% target ($97,010 ahead on $395,800 this financial year to date).</a:t>
+              <a:t>Trades · Maintenance contracts. May against May last year: 44.9%; Year to date (Jul to May 2026): $443,350; Gross margin, year to date: 63.9%. Maintenance contracts brought in $443,350 this financial year to date, at a 63.9% gross margin (above the 44.1% overall). Maintenance contracts: 63.9% gross margin, 28.9 points over the 35.0% target ($127,918 ahead on $443,350 this financial year to date).</a:t>
             </a:r>
           </a:p>
         </p:txBody>
@@ -1869,7 +1869,7 @@
           <a:lstStyle/>
           <a:p>
             <a:r>
-              <a:t>Trades · Installations. May against May last year: 15.1%; Year to date (Jul to May 2026): $1,103,900; Gross margin, year to date: 28.4%. Installations brought in $1,103,900 this financial year to date, at a 28.4% gross margin (below the 37.7% overall). Installations: 28.4% gross margin, 6.6 points under the 35.0% target: about $72,943 on $1,103,900 of revenue this financial year to date. It's below the 39.9% needed to cover overheads, too.</a:t>
+              <a:t>Trades · Installations. May against May last year: 15.0%; Year to date (Jul to May 2026): $1,236,200; Gross margin, year to date: 36.1%. Installations brought in $1,236,200 this financial year to date, at a 36.1% gross margin (below the 44.1% overall). Installations: 36.1% gross margin, 1.1 points over the 35.0% target ($13,052 ahead on $1,236,200 this financial year to date).</a:t>
             </a:r>
           </a:p>
         </p:txBody>
@@ -1939,7 +1939,7 @@
           <a:lstStyle/>
           <a:p>
             <a:r>
-              <a:t>Trades · Call-outs and repairs. May against May last year: 34.6%; Year to date (Jul to May 2026): $272,844; Gross margin, year to date: 43.7%. Call-outs and repairs brought in $272,844 this financial year to date, at a 43.7% gross margin (above the 37.7% overall). Call-outs and repairs: 43.7% gross margin, 8.7 points over the 35.0% target ($23,833 ahead on $272,844 this financial year to date).</a:t>
+              <a:t>Trades · Call-outs and repairs. May against May last year: 34.7%; Year to date (Jul to May 2026): $296,149; Gross margin, year to date: 48.2%. Call-outs and repairs brought in $296,149 this financial year to date, at a 48.2% gross margin (above the 44.1% overall). Call-outs and repairs: 48.2% gross margin, 13.2 points over the 35.0% target ($38,981 ahead on $296,149 this financial year to date).</a:t>
             </a:r>
           </a:p>
         </p:txBody>
@@ -2009,7 +2009,7 @@
           <a:lstStyle/>
           <a:p>
             <a:r>
-              <a:t>By line: financial year to date (Jul to May 2026) against the same period last year · Trades. Same period last year: Not available: the data starts October 2024. From gross margin to profit: May's jobs made $63,105 gross margin (39.0%). Technician time not charged to jobs took $5,402 and overheads $59,270, leaving ($1,567) profit before tax ((1.0%) of revenue). To cover overheads, jobs need a 39.9% gross margin on average.</a:t>
+              <a:t>By line: financial year to date (Jul to May 2026) against the same period last year · Trades. Same period last year: Not available: the data starts October 2024. From gross margin to profit: May's jobs made $81,484 gross margin (45.2%). Technician time not charged to jobs took $23,154 and overheads $59,270, leaving ($940) profit before tax ((0.5%) of revenue). To cover overheads, jobs need a 45.7% gross margin on average.</a:t>
             </a:r>
           </a:p>
         </p:txBody>
@@ -5424,7 +5424,7 @@
                 </a:solidFill>
                 <a:latin typeface="Roboto"/>
               </a:rPr>
-              <a:t>Data retrieved 2pm, Tue 6 Oct 2026 · Generated 8 Oct 2026, 9:35am · Sample data · Made with Python (python-pptx)</a:t>
+              <a:t>Data retrieved 2pm, Tue 6 Oct 2026 · Generated 9 Oct 2026, 8:41am · Sample data · Made with Python (python-pptx)</a:t>
             </a:r>
           </a:p>
         </p:txBody>
@@ -5770,7 +5770,7 @@
                 </a:solidFill>
                 <a:latin typeface="Roboto"/>
               </a:rPr>
-              <a:t>24.8%</a:t>
+              <a:t>24.7%</a:t>
             </a:r>
           </a:p>
         </p:txBody>
@@ -5809,7 +5809,7 @@
                 </a:solidFill>
                 <a:latin typeface="Roboto"/>
               </a:rPr>
-              <a:t>$161,963 against $129,816</a:t>
+              <a:t>$180,342 against $144,649</a:t>
             </a:r>
           </a:p>
         </p:txBody>
@@ -5936,7 +5936,7 @@
                 </a:solidFill>
                 <a:latin typeface="Roboto"/>
               </a:rPr>
-              <a:t>$1,772,544</a:t>
+              <a:t>$1,975,699</a:t>
             </a:r>
           </a:p>
         </p:txBody>
@@ -6102,7 +6102,7 @@
                 </a:solidFill>
                 <a:latin typeface="Roboto"/>
               </a:rPr>
-              <a:t>37.7%</a:t>
+              <a:t>44.1%</a:t>
             </a:r>
           </a:p>
         </p:txBody>
@@ -6141,7 +6141,7 @@
                 </a:solidFill>
                 <a:latin typeface="Roboto"/>
               </a:rPr>
-              <a:t>$668,290 before overheads</a:t>
+              <a:t>$871,445 before overheads</a:t>
             </a:r>
           </a:p>
         </p:txBody>
@@ -6156,7 +6156,7 @@
         </p:nvGraphicFramePr>
         <p:xfrm>
           <a:off x="457200" y="2604516"/>
-          <a:ext cx="11277295" cy="2119884"/>
+          <a:ext cx="11277295" cy="2318004"/>
         </p:xfrm>
         <a:graphic>
           <a:graphicData uri="http://schemas.openxmlformats.org/drawingml/2006/chart">
@@ -6172,8 +6172,8 @@
         </p:nvSpPr>
         <p:spPr>
           <a:xfrm>
-            <a:off x="457200" y="4815840"/>
-            <a:ext cx="5501487" cy="1493520"/>
+            <a:off x="457200" y="5013960"/>
+            <a:ext cx="5501487" cy="1295400"/>
           </a:xfrm>
           <a:prstGeom prst="rect">
             <a:avLst/>
@@ -6221,7 +6221,7 @@
         </p:nvSpPr>
         <p:spPr>
           <a:xfrm>
-            <a:off x="594360" y="4870704"/>
+            <a:off x="594360" y="5068824"/>
             <a:ext cx="5227167" cy="274320"/>
           </a:xfrm>
           <a:prstGeom prst="rect">
@@ -6260,8 +6260,8 @@
         </p:nvSpPr>
         <p:spPr>
           <a:xfrm>
-            <a:off x="594360" y="5145024"/>
-            <a:ext cx="5227167" cy="1127760"/>
+            <a:off x="594360" y="5343144"/>
+            <a:ext cx="5227167" cy="929640"/>
           </a:xfrm>
           <a:prstGeom prst="rect">
             <a:avLst/>
@@ -6286,7 +6286,7 @@
                 </a:solidFill>
                 <a:latin typeface="Roboto"/>
               </a:rPr>
-              <a:t>Revenue is $1,772,544 this financial year to date (Jul to May 2026). Maintenance contracts make the highest gross margin (59.5%); Installations the lowest (28.4%). The business needs 39.9% gross margin just to cover overheads.</a:t>
+              <a:t>Revenue is $1,975,699 this financial year to date (Jul to May 2026). Maintenance contracts make the highest gross margin (63.9%); Installations the lowest (36.1%). The business needs 45.7% gross margin just to cover overheads.</a:t>
             </a:r>
           </a:p>
         </p:txBody>
@@ -6299,8 +6299,8 @@
         </p:nvSpPr>
         <p:spPr>
           <a:xfrm>
-            <a:off x="6233007" y="4815840"/>
-            <a:ext cx="5501487" cy="1493520"/>
+            <a:off x="6233007" y="5013960"/>
+            <a:ext cx="5501487" cy="1295400"/>
           </a:xfrm>
           <a:prstGeom prst="rect">
             <a:avLst/>
@@ -6348,7 +6348,7 @@
         </p:nvSpPr>
         <p:spPr>
           <a:xfrm>
-            <a:off x="6370167" y="4870704"/>
+            <a:off x="6370167" y="5068824"/>
             <a:ext cx="5227167" cy="274320"/>
           </a:xfrm>
           <a:prstGeom prst="rect">
@@ -6387,8 +6387,8 @@
         </p:nvSpPr>
         <p:spPr>
           <a:xfrm>
-            <a:off x="6370167" y="5145024"/>
-            <a:ext cx="5227167" cy="1127760"/>
+            <a:off x="6370167" y="5343144"/>
+            <a:ext cx="5227167" cy="929640"/>
           </a:xfrm>
           <a:prstGeom prst="rect">
             <a:avLst/>
@@ -6413,7 +6413,7 @@
                 </a:solidFill>
                 <a:latin typeface="Roboto"/>
               </a:rPr>
-              <a:t>Installations: 28.4% gross margin, 6.6 points under the 35.0% target: about $72,943 on $1,103,900 of revenue this financial year to date. It's below the 39.9% needed to cover overheads, too. Maintenance contracts: 59.5% gross margin, 24.5 points over the 35.0% target ($97,010 ahead on $395,800 this financial year to date).</a:t>
+              <a:t>Installations: 36.1% gross margin, 1.1 points over the 35.0% target ($13,052 ahead on $1,236,200 this financial year to date). Maintenance contracts: 63.9% gross margin, 28.9 points over the 35.0% target ($127,918 ahead on $443,350 this financial year to date).</a:t>
             </a:r>
           </a:p>
         </p:txBody>
@@ -6491,7 +6491,7 @@
                 </a:solidFill>
                 <a:latin typeface="Roboto"/>
               </a:rPr>
-              <a:t>Data retrieved 2pm, Tue 6 Oct 2026 · Generated 8 Oct 2026, 9:35am · Sample data · Made with Python (python-pptx)</a:t>
+              <a:t>Data retrieved 2pm, Tue 6 Oct 2026 · Generated 9 Oct 2026, 8:41am · Sample data · Made with Python (python-pptx)</a:t>
             </a:r>
           </a:p>
         </p:txBody>
@@ -6837,7 +6837,7 @@
                 </a:solidFill>
                 <a:latin typeface="Roboto"/>
               </a:rPr>
-              <a:t>45.0%</a:t>
+              <a:t>44.9%</a:t>
             </a:r>
           </a:p>
         </p:txBody>
@@ -6876,7 +6876,7 @@
                 </a:solidFill>
                 <a:latin typeface="Roboto"/>
               </a:rPr>
-              <a:t>$40,500 against $27,930</a:t>
+              <a:t>$45,350 against $31,300</a:t>
             </a:r>
           </a:p>
         </p:txBody>
@@ -7003,7 +7003,7 @@
                 </a:solidFill>
                 <a:latin typeface="Roboto"/>
               </a:rPr>
-              <a:t>$395,800</a:t>
+              <a:t>$443,350</a:t>
             </a:r>
           </a:p>
         </p:txBody>
@@ -7169,7 +7169,7 @@
                 </a:solidFill>
                 <a:latin typeface="Roboto"/>
               </a:rPr>
-              <a:t>59.5%</a:t>
+              <a:t>63.9%</a:t>
             </a:r>
           </a:p>
         </p:txBody>
@@ -7208,7 +7208,7 @@
                 </a:solidFill>
                 <a:latin typeface="Roboto"/>
               </a:rPr>
-              <a:t>$235,540 before overheads</a:t>
+              <a:t>$283,090 before overheads</a:t>
             </a:r>
           </a:p>
         </p:txBody>
@@ -7353,7 +7353,7 @@
                 </a:solidFill>
                 <a:latin typeface="Roboto"/>
               </a:rPr>
-              <a:t>Maintenance contracts brought in $395,800 this financial year to date, at a 59.5% gross margin (above the 37.7% overall).</a:t>
+              <a:t>Maintenance contracts brought in $443,350 this financial year to date, at a 63.9% gross margin (above the 44.1% overall).</a:t>
             </a:r>
           </a:p>
         </p:txBody>
@@ -7480,7 +7480,7 @@
                 </a:solidFill>
                 <a:latin typeface="Roboto"/>
               </a:rPr>
-              <a:t>Maintenance contracts: 59.5% gross margin, 24.5 points over the 35.0% target ($97,010 ahead on $395,800 this financial year to date).</a:t>
+              <a:t>Maintenance contracts: 63.9% gross margin, 28.9 points over the 35.0% target ($127,918 ahead on $443,350 this financial year to date).</a:t>
             </a:r>
           </a:p>
         </p:txBody>
@@ -7558,7 +7558,7 @@
                 </a:solidFill>
                 <a:latin typeface="Roboto"/>
               </a:rPr>
-              <a:t>Data retrieved 2pm, Tue 6 Oct 2026 · Generated 8 Oct 2026, 9:35am · Sample data · Made with Python (python-pptx)</a:t>
+              <a:t>Data retrieved 2pm, Tue 6 Oct 2026 · Generated 9 Oct 2026, 8:41am · Sample data · Made with Python (python-pptx)</a:t>
             </a:r>
           </a:p>
         </p:txBody>
@@ -7904,7 +7904,7 @@
                 </a:solidFill>
                 <a:latin typeface="Roboto"/>
               </a:rPr>
-              <a:t>15.1%</a:t>
+              <a:t>15.0%</a:t>
             </a:r>
           </a:p>
         </p:txBody>
@@ -7943,7 +7943,7 @@
                 </a:solidFill>
                 <a:latin typeface="Roboto"/>
               </a:rPr>
-              <a:t>$92,400 against $80,300</a:t>
+              <a:t>$103,400 against $89,900</a:t>
             </a:r>
           </a:p>
         </p:txBody>
@@ -8070,7 +8070,7 @@
                 </a:solidFill>
                 <a:latin typeface="Roboto"/>
               </a:rPr>
-              <a:t>$1,103,900</a:t>
+              <a:t>$1,236,200</a:t>
             </a:r>
           </a:p>
         </p:txBody>
@@ -8236,7 +8236,7 @@
                 </a:solidFill>
                 <a:latin typeface="Roboto"/>
               </a:rPr>
-              <a:t>28.4%</a:t>
+              <a:t>36.1%</a:t>
             </a:r>
           </a:p>
         </p:txBody>
@@ -8275,7 +8275,7 @@
                 </a:solidFill>
                 <a:latin typeface="Roboto"/>
               </a:rPr>
-              <a:t>$313,422 before overheads</a:t>
+              <a:t>$445,722 before overheads</a:t>
             </a:r>
           </a:p>
         </p:txBody>
@@ -8290,7 +8290,7 @@
         </p:nvGraphicFramePr>
         <p:xfrm>
           <a:off x="457200" y="2604516"/>
-          <a:ext cx="11277295" cy="2516124"/>
+          <a:ext cx="11277295" cy="2714244"/>
         </p:xfrm>
         <a:graphic>
           <a:graphicData uri="http://schemas.openxmlformats.org/drawingml/2006/chart">
@@ -8306,8 +8306,8 @@
         </p:nvSpPr>
         <p:spPr>
           <a:xfrm>
-            <a:off x="457200" y="5212080"/>
-            <a:ext cx="5501487" cy="1097280"/>
+            <a:off x="457200" y="5410200"/>
+            <a:ext cx="5501487" cy="899160"/>
           </a:xfrm>
           <a:prstGeom prst="rect">
             <a:avLst/>
@@ -8355,7 +8355,7 @@
         </p:nvSpPr>
         <p:spPr>
           <a:xfrm>
-            <a:off x="594360" y="5266944"/>
+            <a:off x="594360" y="5465064"/>
             <a:ext cx="5227167" cy="274320"/>
           </a:xfrm>
           <a:prstGeom prst="rect">
@@ -8394,8 +8394,8 @@
         </p:nvSpPr>
         <p:spPr>
           <a:xfrm>
-            <a:off x="594360" y="5541264"/>
-            <a:ext cx="5227167" cy="731520"/>
+            <a:off x="594360" y="5739384"/>
+            <a:ext cx="5227167" cy="533400"/>
           </a:xfrm>
           <a:prstGeom prst="rect">
             <a:avLst/>
@@ -8420,7 +8420,7 @@
                 </a:solidFill>
                 <a:latin typeface="Roboto"/>
               </a:rPr>
-              <a:t>Installations brought in $1,103,900 this financial year to date, at a 28.4% gross margin (below the 37.7% overall).</a:t>
+              <a:t>Installations brought in $1,236,200 this financial year to date, at a 36.1% gross margin (below the 44.1% overall).</a:t>
             </a:r>
           </a:p>
         </p:txBody>
@@ -8433,8 +8433,8 @@
         </p:nvSpPr>
         <p:spPr>
           <a:xfrm>
-            <a:off x="6233007" y="5212080"/>
-            <a:ext cx="5501487" cy="1097280"/>
+            <a:off x="6233007" y="5410200"/>
+            <a:ext cx="5501487" cy="899160"/>
           </a:xfrm>
           <a:prstGeom prst="rect">
             <a:avLst/>
@@ -8482,7 +8482,7 @@
         </p:nvSpPr>
         <p:spPr>
           <a:xfrm>
-            <a:off x="6370167" y="5266944"/>
+            <a:off x="6370167" y="5465064"/>
             <a:ext cx="5227167" cy="274320"/>
           </a:xfrm>
           <a:prstGeom prst="rect">
@@ -8521,8 +8521,8 @@
         </p:nvSpPr>
         <p:spPr>
           <a:xfrm>
-            <a:off x="6370167" y="5541264"/>
-            <a:ext cx="5227167" cy="731520"/>
+            <a:off x="6370167" y="5739384"/>
+            <a:ext cx="5227167" cy="533400"/>
           </a:xfrm>
           <a:prstGeom prst="rect">
             <a:avLst/>
@@ -8547,7 +8547,7 @@
                 </a:solidFill>
                 <a:latin typeface="Roboto"/>
               </a:rPr>
-              <a:t>Installations: 28.4% gross margin, 6.6 points under the 35.0% target: about $72,943 on $1,103,900 of revenue this financial year to date. It's below the 39.9% needed to cover overheads, too.</a:t>
+              <a:t>Installations: 36.1% gross margin, 1.1 points over the 35.0% target ($13,052 ahead on $1,236,200 this financial year to date).</a:t>
             </a:r>
           </a:p>
         </p:txBody>
@@ -8625,7 +8625,7 @@
                 </a:solidFill>
                 <a:latin typeface="Roboto"/>
               </a:rPr>
-              <a:t>Data retrieved 2pm, Tue 6 Oct 2026 · Generated 8 Oct 2026, 9:35am · Sample data · Made with Python (python-pptx)</a:t>
+              <a:t>Data retrieved 2pm, Tue 6 Oct 2026 · Generated 9 Oct 2026, 8:41am · Sample data · Made with Python (python-pptx)</a:t>
             </a:r>
           </a:p>
         </p:txBody>
@@ -8971,7 +8971,7 @@
                 </a:solidFill>
                 <a:latin typeface="Roboto"/>
               </a:rPr>
-              <a:t>34.6%</a:t>
+              <a:t>34.7%</a:t>
             </a:r>
           </a:p>
         </p:txBody>
@@ -9010,7 +9010,7 @@
                 </a:solidFill>
                 <a:latin typeface="Roboto"/>
               </a:rPr>
-              <a:t>$29,063 against $21,586</a:t>
+              <a:t>$31,592 against $23,449</a:t>
             </a:r>
           </a:p>
         </p:txBody>
@@ -9137,7 +9137,7 @@
                 </a:solidFill>
                 <a:latin typeface="Roboto"/>
               </a:rPr>
-              <a:t>$272,844</a:t>
+              <a:t>$296,149</a:t>
             </a:r>
           </a:p>
         </p:txBody>
@@ -9303,7 +9303,7 @@
                 </a:solidFill>
                 <a:latin typeface="Roboto"/>
               </a:rPr>
-              <a:t>43.7%</a:t>
+              <a:t>48.2%</a:t>
             </a:r>
           </a:p>
         </p:txBody>
@@ -9342,7 +9342,7 @@
                 </a:solidFill>
                 <a:latin typeface="Roboto"/>
               </a:rPr>
-              <a:t>$119,328 before overheads</a:t>
+              <a:t>$142,633 before overheads</a:t>
             </a:r>
           </a:p>
         </p:txBody>
@@ -9487,7 +9487,7 @@
                 </a:solidFill>
                 <a:latin typeface="Roboto"/>
               </a:rPr>
-              <a:t>Call-outs and repairs brought in $272,844 this financial year to date, at a 43.7% gross margin (above the 37.7% overall).</a:t>
+              <a:t>Call-outs and repairs brought in $296,149 this financial year to date, at a 48.2% gross margin (above the 44.1% overall).</a:t>
             </a:r>
           </a:p>
         </p:txBody>
@@ -9614,7 +9614,7 @@
                 </a:solidFill>
                 <a:latin typeface="Roboto"/>
               </a:rPr>
-              <a:t>Call-outs and repairs: 43.7% gross margin, 8.7 points over the 35.0% target ($23,833 ahead on $272,844 this financial year to date).</a:t>
+              <a:t>Call-outs and repairs: 48.2% gross margin, 13.2 points over the 35.0% target ($38,981 ahead on $296,149 this financial year to date).</a:t>
             </a:r>
           </a:p>
         </p:txBody>
@@ -9692,7 +9692,7 @@
                 </a:solidFill>
                 <a:latin typeface="Roboto"/>
               </a:rPr>
-              <a:t>Data retrieved 2pm, Tue 6 Oct 2026 · Generated 8 Oct 2026, 9:35am · Sample data · Made with Python (python-pptx)</a:t>
+              <a:t>Data retrieved 2pm, Tue 6 Oct 2026 · Generated 9 Oct 2026, 8:41am · Sample data · Made with Python (python-pptx)</a:t>
             </a:r>
           </a:p>
         </p:txBody>
@@ -9911,7 +9911,7 @@
                 </a:solidFill>
                 <a:latin typeface="Roboto"/>
               </a:rPr>
-              <a:t>Same period last year: Not available: the data starts October 2024. From gross margin to profit: May's jobs made $63,105 gross margin (39.0%). Technician time not charged to jobs took $5,402 and overheads $59,270, leaving ($1,567) profit before tax ((1.0%) of revenue). To cover overheads, jobs need a 39.9% gross margin on average.</a:t>
+              <a:t>Same period last year: Not available: the data starts October 2024. From gross margin to profit: May's jobs made $81,484 gross margin (45.2%). Technician time not charged to jobs took $23,154 and overheads $59,270, leaving ($940) profit before tax ((0.5%) of revenue). To cover overheads, jobs need a 45.7% gross margin on average.</a:t>
             </a:r>
           </a:p>
         </p:txBody>
@@ -10142,7 +10142,7 @@
                           </a:solidFill>
                           <a:latin typeface="Roboto"/>
                         </a:rPr>
-                        <a:t>$395,800</a:t>
+                        <a:t>$443,350</a:t>
                       </a:r>
                     </a:p>
                   </a:txBody>
@@ -10223,7 +10223,7 @@
                           </a:solidFill>
                           <a:latin typeface="Roboto"/>
                         </a:rPr>
-                        <a:t>$235,540</a:t>
+                        <a:t>$283,090</a:t>
                       </a:r>
                     </a:p>
                   </a:txBody>
@@ -10250,7 +10250,7 @@
                           </a:solidFill>
                           <a:latin typeface="Roboto"/>
                         </a:rPr>
-                        <a:t>59.5%</a:t>
+                        <a:t>63.9%</a:t>
                       </a:r>
                     </a:p>
                   </a:txBody>
@@ -10306,7 +10306,7 @@
                           </a:solidFill>
                           <a:latin typeface="Roboto"/>
                         </a:rPr>
-                        <a:t>$1,103,900</a:t>
+                        <a:t>$1,236,200</a:t>
                       </a:r>
                     </a:p>
                   </a:txBody>
@@ -10387,7 +10387,7 @@
                           </a:solidFill>
                           <a:latin typeface="Roboto"/>
                         </a:rPr>
-                        <a:t>$313,422</a:t>
+                        <a:t>$445,722</a:t>
                       </a:r>
                     </a:p>
                   </a:txBody>
@@ -10414,7 +10414,7 @@
                           </a:solidFill>
                           <a:latin typeface="Roboto"/>
                         </a:rPr>
-                        <a:t>28.4%</a:t>
+                        <a:t>36.1%</a:t>
                       </a:r>
                     </a:p>
                   </a:txBody>
@@ -10470,7 +10470,7 @@
                           </a:solidFill>
                           <a:latin typeface="Roboto"/>
                         </a:rPr>
-                        <a:t>$272,844</a:t>
+                        <a:t>$296,149</a:t>
                       </a:r>
                     </a:p>
                   </a:txBody>
@@ -10551,7 +10551,7 @@
                           </a:solidFill>
                           <a:latin typeface="Roboto"/>
                         </a:rPr>
-                        <a:t>$119,328</a:t>
+                        <a:t>$142,633</a:t>
                       </a:r>
                     </a:p>
                   </a:txBody>
@@ -10578,7 +10578,7 @@
                           </a:solidFill>
                           <a:latin typeface="Roboto"/>
                         </a:rPr>
-                        <a:t>43.7%</a:t>
+                        <a:t>48.2%</a:t>
                       </a:r>
                     </a:p>
                   </a:txBody>
@@ -10634,7 +10634,7 @@
                           </a:solidFill>
                           <a:latin typeface="Roboto"/>
                         </a:rPr>
-                        <a:t>$1,772,544</a:t>
+                        <a:t>$1,975,699</a:t>
                       </a:r>
                     </a:p>
                   </a:txBody>
@@ -10715,7 +10715,7 @@
                           </a:solidFill>
                           <a:latin typeface="Roboto"/>
                         </a:rPr>
-                        <a:t>$668,290</a:t>
+                        <a:t>$871,445</a:t>
                       </a:r>
                     </a:p>
                   </a:txBody>
@@ -10742,7 +10742,7 @@
                           </a:solidFill>
                           <a:latin typeface="Roboto"/>
                         </a:rPr>
-                        <a:t>37.7%</a:t>
+                        <a:t>44.1%</a:t>
                       </a:r>
                     </a:p>
                   </a:txBody>
@@ -10830,7 +10830,7 @@
                 </a:solidFill>
                 <a:latin typeface="Roboto"/>
               </a:rPr>
-              <a:t>Data retrieved 2pm, Tue 6 Oct 2026 · Generated 8 Oct 2026, 9:35am · Sample data · Made with Python (python-pptx)</a:t>
+              <a:t>Data retrieved 2pm, Tue 6 Oct 2026 · Generated 9 Oct 2026, 8:41am · Sample data · Made with Python (python-pptx)</a:t>
             </a:r>
           </a:p>
         </p:txBody>
